--- a/Unit 2/For LIve Session Unit 2 Student.pptx
+++ b/Unit 2/For LIve Session Unit 2 Student.pptx
@@ -245,7 +245,7 @@
           <a:p>
             <a:fld id="{4E223589-D1FE-5045-809F-56B69D3AD8BF}" type="datetimeFigureOut">
               <a:rPr lang="en-US" smtClean="0"/>
-              <a:t>5/5/22</a:t>
+              <a:t>8/24/26</a:t>
             </a:fld>
             <a:endParaRPr lang="en-US"/>
           </a:p>
@@ -415,7 +415,7 @@
           <a:p>
             <a:fld id="{4E223589-D1FE-5045-809F-56B69D3AD8BF}" type="datetimeFigureOut">
               <a:rPr lang="en-US" smtClean="0"/>
-              <a:t>5/5/22</a:t>
+              <a:t>8/24/26</a:t>
             </a:fld>
             <a:endParaRPr lang="en-US"/>
           </a:p>
@@ -595,7 +595,7 @@
           <a:p>
             <a:fld id="{4E223589-D1FE-5045-809F-56B69D3AD8BF}" type="datetimeFigureOut">
               <a:rPr lang="en-US" smtClean="0"/>
-              <a:t>5/5/22</a:t>
+              <a:t>8/24/26</a:t>
             </a:fld>
             <a:endParaRPr lang="en-US"/>
           </a:p>
@@ -765,7 +765,7 @@
           <a:p>
             <a:fld id="{4E223589-D1FE-5045-809F-56B69D3AD8BF}" type="datetimeFigureOut">
               <a:rPr lang="en-US" smtClean="0"/>
-              <a:t>5/5/22</a:t>
+              <a:t>8/24/26</a:t>
             </a:fld>
             <a:endParaRPr lang="en-US"/>
           </a:p>
@@ -1009,7 +1009,7 @@
           <a:p>
             <a:fld id="{4E223589-D1FE-5045-809F-56B69D3AD8BF}" type="datetimeFigureOut">
               <a:rPr lang="en-US" smtClean="0"/>
-              <a:t>5/5/22</a:t>
+              <a:t>8/24/26</a:t>
             </a:fld>
             <a:endParaRPr lang="en-US"/>
           </a:p>
@@ -1241,7 +1241,7 @@
           <a:p>
             <a:fld id="{4E223589-D1FE-5045-809F-56B69D3AD8BF}" type="datetimeFigureOut">
               <a:rPr lang="en-US" smtClean="0"/>
-              <a:t>5/5/22</a:t>
+              <a:t>8/24/26</a:t>
             </a:fld>
             <a:endParaRPr lang="en-US"/>
           </a:p>
@@ -1608,7 +1608,7 @@
           <a:p>
             <a:fld id="{4E223589-D1FE-5045-809F-56B69D3AD8BF}" type="datetimeFigureOut">
               <a:rPr lang="en-US" smtClean="0"/>
-              <a:t>5/5/22</a:t>
+              <a:t>8/24/26</a:t>
             </a:fld>
             <a:endParaRPr lang="en-US"/>
           </a:p>
@@ -1726,7 +1726,7 @@
           <a:p>
             <a:fld id="{4E223589-D1FE-5045-809F-56B69D3AD8BF}" type="datetimeFigureOut">
               <a:rPr lang="en-US" smtClean="0"/>
-              <a:t>5/5/22</a:t>
+              <a:t>8/24/26</a:t>
             </a:fld>
             <a:endParaRPr lang="en-US"/>
           </a:p>
@@ -1821,7 +1821,7 @@
           <a:p>
             <a:fld id="{4E223589-D1FE-5045-809F-56B69D3AD8BF}" type="datetimeFigureOut">
               <a:rPr lang="en-US" smtClean="0"/>
-              <a:t>5/5/22</a:t>
+              <a:t>8/24/26</a:t>
             </a:fld>
             <a:endParaRPr lang="en-US"/>
           </a:p>
@@ -2098,7 +2098,7 @@
           <a:p>
             <a:fld id="{4E223589-D1FE-5045-809F-56B69D3AD8BF}" type="datetimeFigureOut">
               <a:rPr lang="en-US" smtClean="0"/>
-              <a:t>5/5/22</a:t>
+              <a:t>8/24/26</a:t>
             </a:fld>
             <a:endParaRPr lang="en-US"/>
           </a:p>
@@ -2355,7 +2355,7 @@
           <a:p>
             <a:fld id="{4E223589-D1FE-5045-809F-56B69D3AD8BF}" type="datetimeFigureOut">
               <a:rPr lang="en-US" smtClean="0"/>
-              <a:t>5/5/22</a:t>
+              <a:t>8/24/26</a:t>
             </a:fld>
             <a:endParaRPr lang="en-US"/>
           </a:p>
@@ -2568,7 +2568,7 @@
           <a:p>
             <a:fld id="{4E223589-D1FE-5045-809F-56B69D3AD8BF}" type="datetimeFigureOut">
               <a:rPr lang="en-US" smtClean="0"/>
-              <a:t>5/5/22</a:t>
+              <a:t>8/24/26</a:t>
             </a:fld>
             <a:endParaRPr lang="en-US"/>
           </a:p>
@@ -2991,7 +2991,7 @@
         </p:nvSpPr>
         <p:spPr>
           <a:xfrm>
-            <a:off x="200721" y="1122363"/>
+            <a:off x="195146" y="2235200"/>
             <a:ext cx="8753707" cy="2387600"/>
           </a:xfrm>
         </p:spPr>
@@ -3012,31 +3012,6 @@
               <a:rPr lang="en-US" dirty="0"/>
               <a:t>For Live Session Assignment</a:t>
             </a:r>
-          </a:p>
-        </p:txBody>
-      </p:sp>
-      <p:sp>
-        <p:nvSpPr>
-          <p:cNvPr id="3" name="Subtitle 2">
-            <a:extLst>
-              <a:ext uri="{FF2B5EF4-FFF2-40B4-BE49-F238E27FC236}">
-                <a16:creationId xmlns:a16="http://schemas.microsoft.com/office/drawing/2014/main" id="{238A4856-25CB-D14D-A214-6A2633A851AC}"/>
-              </a:ext>
-            </a:extLst>
-          </p:cNvPr>
-          <p:cNvSpPr>
-            <a:spLocks noGrp="1"/>
-          </p:cNvSpPr>
-          <p:nvPr>
-            <p:ph type="subTitle" idx="1"/>
-          </p:nvPr>
-        </p:nvSpPr>
-        <p:spPr/>
-        <p:txBody>
-          <a:bodyPr/>
-          <a:lstStyle/>
-          <a:p>
-            <a:endParaRPr lang="en-US"/>
           </a:p>
         </p:txBody>
       </p:sp>
@@ -3146,15 +3121,7 @@
             </a:r>
             <a:r>
               <a:rPr lang="en-US" sz="3400" dirty="0"/>
-              <a:t> dataset. This data set is every NBA basketball player from 1950 to present.  It contains their height, weight, position and the year they played (among other data.) (Position: F-Forward, C-Centers, F-C and C-F – Forward /Centers, G – Guards, F-G – Forward/Guards)  FYI: If you feel that these questions are open ended or at least a little vague, this is on purpose.  Answer the question as you understand it and make any assumptions you need to </a:t>
-            </a:r>
-            <a:r>
-              <a:rPr lang="en-US" sz="3400"/>
-              <a:t>make to </a:t>
-            </a:r>
-            <a:r>
-              <a:rPr lang="en-US" sz="3400" dirty="0"/>
-              <a:t>answer the question and record those assumptions. (3-5 hours)</a:t>
+              <a:t> dataset. This data set is every NBA basketball player from 1950 to present.  It contains their height, weight, position and the year they played (among other data.) (Position: F-Forward, C-Centers, F-C and C-F – Forward /Centers, G – Guards, F-G – Forward/Guards)  FYI: If you feel that these questions are open ended or at least a little vague, this is on purpose.  Answer the question as you understand it and make any assumptions you need to make to answer the question. Also make sure to record those assumptions. (3-5 hours)</a:t>
             </a:r>
           </a:p>
           <a:p>
